--- a/assets/pptx/catalog-311.pptx
+++ b/assets/pptx/catalog-311.pptx
@@ -3248,7 +3248,7 @@
                 <a:ea typeface="Ebrima"/>
                 <a:cs typeface="Ebrima"/>
               </a:rPr>
-              <a:t>አጠገቤ ሆኗል ጌታ (4x)</a:t>
+              <a:t>አጠገቤ ሆኗል ጌታ 4x</a:t>
             </a:r>
           </a:p>
           <a:p>
@@ -3405,7 +3405,7 @@
                 <a:ea typeface="Ebrima"/>
                 <a:cs typeface="Ebrima"/>
               </a:rPr>
-              <a:t>ትዝ ሲለኝ (2x)</a:t>
+              <a:t>ትዝ ሲለኝ 2x</a:t>
             </a:r>
           </a:p>
           <a:p>
@@ -3441,7 +3441,7 @@
                 <a:ea typeface="Ebrima"/>
                 <a:cs typeface="Ebrima"/>
               </a:rPr>
-              <a:t>ትዝ ሲለኝ (2x)</a:t>
+              <a:t>ትዝ ሲለኝ 2x</a:t>
             </a:r>
           </a:p>
         </p:txBody>
@@ -3665,7 +3665,7 @@
                 <a:ea typeface="Ebrima"/>
                 <a:cs typeface="Ebrima"/>
               </a:rPr>
-              <a:t>አጠገቤ ሆኗል ጌታ (4x)</a:t>
+              <a:t>አጠገቤ ሆኗል ጌታ 4x</a:t>
             </a:r>
           </a:p>
           <a:p>
@@ -3822,7 +3822,7 @@
                 <a:ea typeface="Ebrima"/>
                 <a:cs typeface="Ebrima"/>
               </a:rPr>
-              <a:t>ትዝ ሲለኝ (2x)</a:t>
+              <a:t>ትዝ ሲለኝ 2x</a:t>
             </a:r>
           </a:p>
           <a:p>
@@ -3858,7 +3858,7 @@
                 <a:ea typeface="Ebrima"/>
                 <a:cs typeface="Ebrima"/>
               </a:rPr>
-              <a:t>ትዝ ሲለኝ (2x)</a:t>
+              <a:t>ትዝ ሲለኝ 2x</a:t>
             </a:r>
           </a:p>
         </p:txBody>
@@ -4082,7 +4082,7 @@
                 <a:ea typeface="Ebrima"/>
                 <a:cs typeface="Ebrima"/>
               </a:rPr>
-              <a:t>አጠገቤ ሆኗል ጌታ (4x)</a:t>
+              <a:t>አጠገቤ ሆኗል ጌታ 4x</a:t>
             </a:r>
           </a:p>
           <a:p>
@@ -4311,7 +4311,7 @@
                 <a:ea typeface="Ebrima"/>
                 <a:cs typeface="Ebrima"/>
               </a:rPr>
-              <a:t>ጌታ አለ ከእኔስ ጋራ (2x)</a:t>
+              <a:t>ጌታ አለ ከእኔስ ጋራ 2x</a:t>
             </a:r>
           </a:p>
         </p:txBody>
